--- a/classes/parte-12-osint-e-ingenieria-social/257-pretexting-y-vishing/clase-257-presentacion.pptx
+++ b/classes/parte-12-osint-e-ingenieria-social/257-pretexting-y-vishing/clase-257-presentacion.pptx
@@ -18,6 +18,10 @@
     <p:sldId id="266" r:id="rId17"/>
     <p:sldId id="267" r:id="rId18"/>
     <p:sldId id="268" r:id="rId19"/>
+    <p:sldId id="269" r:id="rId20"/>
+    <p:sldId id="270" r:id="rId21"/>
+    <p:sldId id="271" r:id="rId22"/>
+    <p:sldId id="272" r:id="rId23"/>
   </p:sldIdLst>
   <p:sldSz cx="9144000" cy="6858000" type="screen4x3"/>
   <p:notesSz cx="6858000" cy="9144000"/>
@@ -3199,7 +3203,7 @@
                   <a:srgbClr val="0B3D2E"/>
                 </a:solidFill>
               </a:rPr>
-              <a:t>📝 Reto verificable</a:t>
+              <a:t>🧰 Herramientas y preparación</a:t>
             </a:r>
           </a:p>
         </p:txBody>
@@ -3237,52 +3241,67 @@
                   <a:srgbClr val="22282E"/>
                 </a:solidFill>
               </a:rPr>
-              <a:t>•  Diseña y ensaya (entre compañeros que consientan) una llamada de vishing de laboratorio con</a:t>
-            </a:r>
-          </a:p>
-          <a:p>
-            <a:pPr>
-              <a:spcAft>
-                <a:spcPts val="600"/>
-              </a:spcAft>
-            </a:pPr>
-            <a:r>
-              <a:rPr sz="1500">
-                <a:solidFill>
-                  <a:srgbClr val="22282E"/>
-                </a:solidFill>
-              </a:rPr>
-              <a:t>•  guion, pretexto sustentado en OSINT, manejo de una objeción y un debrief documentado.</a:t>
-            </a:r>
-          </a:p>
-          <a:p>
-            <a:pPr>
-              <a:spcAft>
-                <a:spcPts val="600"/>
-              </a:spcAft>
-            </a:pPr>
-            <a:r>
-              <a:rPr sz="1500">
-                <a:solidFill>
-                  <a:srgbClr val="22282E"/>
-                </a:solidFill>
-              </a:rPr>
-              <a:t>•  Criterio de aceptación: el ejercicio no involucra a terceros no consintientes, respeta la ley de</a:t>
-            </a:r>
-          </a:p>
-          <a:p>
-            <a:pPr>
-              <a:spcAft>
-                <a:spcPts val="600"/>
-              </a:spcAft>
-            </a:pPr>
-            <a:r>
-              <a:rPr sz="1500">
-                <a:solidFill>
-                  <a:srgbClr val="22282E"/>
-                </a:solidFill>
-              </a:rPr>
-              <a:t>•  grabación y produce al menos dos recomendaciones defensivas concretas para el helpdesk.</a:t>
+              <a:t>•  Guion y árbol de decisión: documento con objetivo, apertura, ramas y salida.</a:t>
+            </a:r>
+          </a:p>
+          <a:p>
+            <a:pPr>
+              <a:spcAft>
+                <a:spcPts val="600"/>
+              </a:spcAft>
+            </a:pPr>
+            <a:r>
+              <a:rPr sz="1500">
+                <a:solidFill>
+                  <a:srgbClr val="22282E"/>
+                </a:solidFill>
+              </a:rPr>
+              <a:t>•  Telefonía de prueba: VoIP (p. ej. un softphone) con número dedicado del engagement; spoofing solo si el contrato y la ley lo permiten.</a:t>
+            </a:r>
+          </a:p>
+          <a:p>
+            <a:pPr>
+              <a:spcAft>
+                <a:spcPts val="600"/>
+              </a:spcAft>
+            </a:pPr>
+            <a:r>
+              <a:rPr sz="1500">
+                <a:solidFill>
+                  <a:srgbClr val="22282E"/>
+                </a:solidFill>
+              </a:rPr>
+              <a:t>•  Grabación: con consentimiento y cumplimiento legal; almacenamiento seguro de la evidencia.</a:t>
+            </a:r>
+          </a:p>
+          <a:p>
+            <a:pPr>
+              <a:spcAft>
+                <a:spcPts val="600"/>
+              </a:spcAft>
+            </a:pPr>
+            <a:r>
+              <a:rPr sz="1500">
+                <a:solidFill>
+                  <a:srgbClr val="22282E"/>
+                </a:solidFill>
+              </a:rPr>
+              <a:t>•  Entorno de ensayo: compañeros que consientan para practicar el guion sin objetivos reales.</a:t>
+            </a:r>
+          </a:p>
+          <a:p>
+            <a:pPr>
+              <a:spcAft>
+                <a:spcPts val="600"/>
+              </a:spcAft>
+            </a:pPr>
+            <a:r>
+              <a:rPr sz="1500">
+                <a:solidFill>
+                  <a:srgbClr val="22282E"/>
+                </a:solidFill>
+              </a:rPr>
+              <a:t>•  Recordatorio: sin autorización escrita de la organización objetivo, no hay llamada real.</a:t>
             </a:r>
           </a:p>
         </p:txBody>
@@ -3333,7 +3352,7 @@
                   <a:srgbClr val="0B3D2E"/>
                 </a:solidFill>
               </a:rPr>
-              <a:t>⚠️ Errores comunes</a:t>
+              <a:t>🧪 Laboratorio guiado (autorizado / entre compañeros)</a:t>
             </a:r>
           </a:p>
         </p:txBody>
@@ -3371,67 +3390,97 @@
                   <a:srgbClr val="22282E"/>
                 </a:solidFill>
               </a:rPr>
-              <a:t>•  El objetivo desconfía de inmediato — Pretexto incoherente con el OSINT. Refuerza detalles y naturalidad.</a:t>
-            </a:r>
-          </a:p>
-          <a:p>
-            <a:pPr>
-              <a:spcAft>
-                <a:spcPts val="600"/>
-              </a:spcAft>
-            </a:pPr>
-            <a:r>
-              <a:rPr sz="1500">
-                <a:solidFill>
-                  <a:srgbClr val="22282E"/>
-                </a:solidFill>
-              </a:rPr>
-              <a:t>•  Presión excesiva sobre la persona — Cruzaste a la coacción. Usa empatía; el objetivo es probar controles, no doblegar personas.</a:t>
-            </a:r>
-          </a:p>
-          <a:p>
-            <a:pPr>
-              <a:spcAft>
-                <a:spcPts val="600"/>
-              </a:spcAft>
-            </a:pPr>
-            <a:r>
-              <a:rPr sz="1500">
-                <a:solidFill>
-                  <a:srgbClr val="22282E"/>
-                </a:solidFill>
-              </a:rPr>
-              <a:t>•  Problema legal por grabar — No hubo consentimiento/aviso. Verifica la ley antes de grabar.</a:t>
-            </a:r>
-          </a:p>
-          <a:p>
-            <a:pPr>
-              <a:spcAft>
-                <a:spcPts val="600"/>
-              </a:spcAft>
-            </a:pPr>
-            <a:r>
-              <a:rPr sz="1500">
-                <a:solidFill>
-                  <a:srgbClr val="22282E"/>
-                </a:solidFill>
-              </a:rPr>
-              <a:t>•  Sin datos útiles tras la llamada — Faltó objetivo claro. Define qué información/acción concreta buscas.</a:t>
-            </a:r>
-          </a:p>
-          <a:p>
-            <a:pPr>
-              <a:spcAft>
-                <a:spcPts val="600"/>
-              </a:spcAft>
-            </a:pPr>
-            <a:r>
-              <a:rPr sz="1500">
-                <a:solidFill>
-                  <a:srgbClr val="22282E"/>
-                </a:solidFill>
-              </a:rPr>
-              <a:t>•  Persona molesta tras el ejercicio — No hubo debrief. Explica siempre y cuida a las personas.</a:t>
+              <a:t>•  Toma el dossier OSINT de un objetivo de laboratorio (empresa ficticia) y extrae datos útiles.</a:t>
+            </a:r>
+          </a:p>
+          <a:p>
+            <a:pPr>
+              <a:spcAft>
+                <a:spcPts val="600"/>
+              </a:spcAft>
+            </a:pPr>
+            <a:r>
+              <a:rPr sz="1500">
+                <a:solidFill>
+                  <a:srgbClr val="22282E"/>
+                </a:solidFill>
+              </a:rPr>
+              <a:t>•  Define el objetivo de la llamada (ej.: verificar si el helpdesk resetea contraseñas sin validar identidad).</a:t>
+            </a:r>
+          </a:p>
+          <a:p>
+            <a:pPr>
+              <a:spcAft>
+                <a:spcPts val="600"/>
+              </a:spcAft>
+            </a:pPr>
+            <a:r>
+              <a:rPr sz="1500">
+                <a:solidFill>
+                  <a:srgbClr val="22282E"/>
+                </a:solidFill>
+              </a:rPr>
+              <a:t>•  Redacta el pretexto: identidad, motivo creíble, urgencia moderada, coherencia con el OSINT.</a:t>
+            </a:r>
+          </a:p>
+          <a:p>
+            <a:pPr>
+              <a:spcAft>
+                <a:spcPts val="600"/>
+              </a:spcAft>
+            </a:pPr>
+            <a:r>
+              <a:rPr sz="1500">
+                <a:solidFill>
+                  <a:srgbClr val="22282E"/>
+                </a:solidFill>
+              </a:rPr>
+              <a:t>•  Escribe el guion con apertura, 3 ramas de conversación y una salida limpia.</a:t>
+            </a:r>
+          </a:p>
+          <a:p>
+            <a:pPr>
+              <a:spcAft>
+                <a:spcPts val="600"/>
+              </a:spcAft>
+            </a:pPr>
+            <a:r>
+              <a:rPr sz="1500">
+                <a:solidFill>
+                  <a:srgbClr val="22282E"/>
+                </a:solidFill>
+              </a:rPr>
+              <a:t>•  Ensaya con un compañero que hace de "objetivo"; graba solo con su consentimiento.</a:t>
+            </a:r>
+          </a:p>
+          <a:p>
+            <a:pPr>
+              <a:spcAft>
+                <a:spcPts val="600"/>
+              </a:spcAft>
+            </a:pPr>
+            <a:r>
+              <a:rPr sz="1500">
+                <a:solidFill>
+                  <a:srgbClr val="22282E"/>
+                </a:solidFill>
+              </a:rPr>
+              <a:t>•  Practica la elicitación: obtén un dato objetivo sin preguntarlo de forma directa.</a:t>
+            </a:r>
+          </a:p>
+          <a:p>
+            <a:pPr>
+              <a:spcAft>
+                <a:spcPts val="600"/>
+              </a:spcAft>
+            </a:pPr>
+            <a:r>
+              <a:rPr sz="1500">
+                <a:solidFill>
+                  <a:srgbClr val="22282E"/>
+                </a:solidFill>
+              </a:rPr>
+              <a:t>•  Maneja una objeción ("no doy esa información") con empatía y sin coacción.</a:t>
             </a:r>
           </a:p>
         </p:txBody>
@@ -3482,7 +3531,7 @@
                   <a:srgbClr val="0B3D2E"/>
                 </a:solidFill>
               </a:rPr>
-              <a:t>❓ Preguntas frecuentes</a:t>
+              <a:t>✍️ Ejercicios</a:t>
             </a:r>
           </a:p>
         </p:txBody>
@@ -3520,97 +3569,82 @@
                   <a:srgbClr val="22282E"/>
                 </a:solidFill>
               </a:rPr>
-              <a:t>•  ❓ ¿Puedo falsificar el número (spoofing)?</a:t>
-            </a:r>
-          </a:p>
-          <a:p>
-            <a:pPr>
-              <a:spcAft>
-                <a:spcPts val="600"/>
-              </a:spcAft>
-            </a:pPr>
-            <a:r>
-              <a:rPr sz="1500">
-                <a:solidFill>
-                  <a:srgbClr val="22282E"/>
-                </a:solidFill>
-              </a:rPr>
-              <a:t>•  Solo si el contrato lo autoriza y la ley de tu jurisdicción lo permite. En muchos lugares el spoofing</a:t>
-            </a:r>
-          </a:p>
-          <a:p>
-            <a:pPr>
-              <a:spcAft>
-                <a:spcPts val="600"/>
-              </a:spcAft>
-            </a:pPr>
-            <a:r>
-              <a:rPr sz="1500">
-                <a:solidFill>
-                  <a:srgbClr val="22282E"/>
-                </a:solidFill>
-              </a:rPr>
-              <a:t>•  fuera de pruebas autorizadas es delito.</a:t>
-            </a:r>
-          </a:p>
-          <a:p>
-            <a:pPr>
-              <a:spcAft>
-                <a:spcPts val="600"/>
-              </a:spcAft>
-            </a:pPr>
-            <a:r>
-              <a:rPr sz="1500">
-                <a:solidFill>
-                  <a:srgbClr val="22282E"/>
-                </a:solidFill>
-              </a:rPr>
-              <a:t>•  ❓ ¿Qué hago si logro comprometer algo real?</a:t>
-            </a:r>
-          </a:p>
-          <a:p>
-            <a:pPr>
-              <a:spcAft>
-                <a:spcPts val="600"/>
-              </a:spcAft>
-            </a:pPr>
-            <a:r>
-              <a:rPr sz="1500">
-                <a:solidFill>
-                  <a:srgbClr val="22282E"/>
-                </a:solidFill>
-              </a:rPr>
-              <a:t>•  Detente, documenta y escala según las Rules of Engagement. No profundices más allá del alcance.</a:t>
-            </a:r>
-          </a:p>
-          <a:p>
-            <a:pPr>
-              <a:spcAft>
-                <a:spcPts val="600"/>
-              </a:spcAft>
-            </a:pPr>
-            <a:r>
-              <a:rPr sz="1500">
-                <a:solidFill>
-                  <a:srgbClr val="22282E"/>
-                </a:solidFill>
-              </a:rPr>
-              <a:t>•  ❓ ¿El vishing sigue funcionando?</a:t>
-            </a:r>
-          </a:p>
-          <a:p>
-            <a:pPr>
-              <a:spcAft>
-                <a:spcPts val="600"/>
-              </a:spcAft>
-            </a:pPr>
-            <a:r>
-              <a:rPr sz="1500">
-                <a:solidFill>
-                  <a:srgbClr val="22282E"/>
-                </a:solidFill>
-              </a:rPr>
-              <a:t>•  Sí, es de los vectores más efectivos: la voz añade autoridad y urgencia que el correo no transmite.</a:t>
+              <a:t>•  Escribe dos pretextos para el mismo objetivo y compara su verosimilitud.</a:t>
+            </a:r>
+          </a:p>
+          <a:p>
+            <a:pPr>
+              <a:spcAft>
+                <a:spcPts val="600"/>
+              </a:spcAft>
+            </a:pPr>
+            <a:r>
+              <a:rPr sz="1500">
+                <a:solidFill>
+                  <a:srgbClr val="22282E"/>
+                </a:solidFill>
+              </a:rPr>
+              <a:t>•  Convierte 5 datos OSINT en frases que refuercen la credibilidad del guion.</a:t>
+            </a:r>
+          </a:p>
+          <a:p>
+            <a:pPr>
+              <a:spcAft>
+                <a:spcPts val="600"/>
+              </a:spcAft>
+            </a:pPr>
+            <a:r>
+              <a:rPr sz="1500">
+                <a:solidFill>
+                  <a:srgbClr val="22282E"/>
+                </a:solidFill>
+              </a:rPr>
+              <a:t>•  Redacta 3 técnicas de elicitación y ensáyalas con un compañero.</a:t>
+            </a:r>
+          </a:p>
+          <a:p>
+            <a:pPr>
+              <a:spcAft>
+                <a:spcPts val="600"/>
+              </a:spcAft>
+            </a:pPr>
+            <a:r>
+              <a:rPr sz="1500">
+                <a:solidFill>
+                  <a:srgbClr val="22282E"/>
+                </a:solidFill>
+              </a:rPr>
+              <a:t>•  Diseña respuestas éticas a 4 objeciones comunes.</a:t>
+            </a:r>
+          </a:p>
+          <a:p>
+            <a:pPr>
+              <a:spcAft>
+                <a:spcPts val="600"/>
+              </a:spcAft>
+            </a:pPr>
+            <a:r>
+              <a:rPr sz="1500">
+                <a:solidFill>
+                  <a:srgbClr val="22282E"/>
+                </a:solidFill>
+              </a:rPr>
+              <a:t>•  Investiga la legalidad de grabar llamadas y del spoofing en tu país.</a:t>
+            </a:r>
+          </a:p>
+          <a:p>
+            <a:pPr>
+              <a:spcAft>
+                <a:spcPts val="600"/>
+              </a:spcAft>
+            </a:pPr>
+            <a:r>
+              <a:rPr sz="1500">
+                <a:solidFill>
+                  <a:srgbClr val="22282E"/>
+                </a:solidFill>
+              </a:rPr>
+              <a:t>•  Propón un control de helpdesk que frustre tu propio pretexto.</a:t>
             </a:r>
           </a:p>
         </p:txBody>
@@ -3661,7 +3695,7 @@
                   <a:srgbClr val="0B3D2E"/>
                 </a:solidFill>
               </a:rPr>
-              <a:t>🔗 Referencias</a:t>
+              <a:t>📝 Reto verificable</a:t>
             </a:r>
           </a:p>
         </p:txBody>
@@ -3699,6 +3733,468 @@
                   <a:srgbClr val="22282E"/>
                 </a:solidFill>
               </a:rPr>
+              <a:t>•  Diseña y ensaya (entre compañeros que consientan) una llamada de vishing de laboratorio con</a:t>
+            </a:r>
+          </a:p>
+          <a:p>
+            <a:pPr>
+              <a:spcAft>
+                <a:spcPts val="600"/>
+              </a:spcAft>
+            </a:pPr>
+            <a:r>
+              <a:rPr sz="1500">
+                <a:solidFill>
+                  <a:srgbClr val="22282E"/>
+                </a:solidFill>
+              </a:rPr>
+              <a:t>•  guion, pretexto sustentado en OSINT, manejo de una objeción y un debrief documentado.</a:t>
+            </a:r>
+          </a:p>
+          <a:p>
+            <a:pPr>
+              <a:spcAft>
+                <a:spcPts val="600"/>
+              </a:spcAft>
+            </a:pPr>
+            <a:r>
+              <a:rPr sz="1500">
+                <a:solidFill>
+                  <a:srgbClr val="22282E"/>
+                </a:solidFill>
+              </a:rPr>
+              <a:t>•  Criterio de aceptación: el ejercicio no involucra a terceros no consintientes, respeta la ley de</a:t>
+            </a:r>
+          </a:p>
+          <a:p>
+            <a:pPr>
+              <a:spcAft>
+                <a:spcPts val="600"/>
+              </a:spcAft>
+            </a:pPr>
+            <a:r>
+              <a:rPr sz="1500">
+                <a:solidFill>
+                  <a:srgbClr val="22282E"/>
+                </a:solidFill>
+              </a:rPr>
+              <a:t>•  grabación y produce al menos dos recomendaciones defensivas concretas para el helpdesk.</a:t>
+            </a:r>
+          </a:p>
+        </p:txBody>
+      </p:sp>
+    </p:spTree>
+  </p:cSld>
+  <p:clrMapOvr>
+    <a:masterClrMapping/>
+  </p:clrMapOvr>
+</p:sld>
+</file>
+
+<file path=ppt/slides/slide14.xml><?xml version="1.0" encoding="utf-8"?>
+<p:sld xmlns:a="http://schemas.openxmlformats.org/drawingml/2006/main" xmlns:p="http://schemas.openxmlformats.org/presentationml/2006/main" xmlns:r="http://schemas.openxmlformats.org/officeDocument/2006/relationships">
+  <p:cSld>
+    <p:spTree>
+      <p:nvGrpSpPr>
+        <p:cNvPr id="1" name=""/>
+        <p:cNvGrpSpPr/>
+        <p:nvPr/>
+      </p:nvGrpSpPr>
+      <p:grpSpPr/>
+      <p:sp>
+        <p:nvSpPr>
+          <p:cNvPr id="2" name="TextBox 1"/>
+          <p:cNvSpPr txBox="1"/>
+          <p:nvPr/>
+        </p:nvSpPr>
+        <p:spPr>
+          <a:xfrm>
+            <a:off x="457200" y="320040"/>
+            <a:ext cx="8229600" cy="822960"/>
+          </a:xfrm>
+          <a:prstGeom prst="rect">
+            <a:avLst/>
+          </a:prstGeom>
+          <a:noFill/>
+        </p:spPr>
+        <p:txBody>
+          <a:bodyPr wrap="square">
+            <a:spAutoFit/>
+          </a:bodyPr>
+          <a:lstStyle/>
+          <a:p>
+            <a:r>
+              <a:rPr sz="2600" b="1">
+                <a:solidFill>
+                  <a:srgbClr val="0B3D2E"/>
+                </a:solidFill>
+              </a:rPr>
+              <a:t>⚠️ Errores comunes</a:t>
+            </a:r>
+          </a:p>
+        </p:txBody>
+      </p:sp>
+      <p:sp>
+        <p:nvSpPr>
+          <p:cNvPr id="3" name="TextBox 2"/>
+          <p:cNvSpPr txBox="1"/>
+          <p:nvPr/>
+        </p:nvSpPr>
+        <p:spPr>
+          <a:xfrm>
+            <a:off x="457200" y="1280160"/>
+            <a:ext cx="8229600" cy="4937760"/>
+          </a:xfrm>
+          <a:prstGeom prst="rect">
+            <a:avLst/>
+          </a:prstGeom>
+          <a:noFill/>
+        </p:spPr>
+        <p:txBody>
+          <a:bodyPr wrap="square">
+            <a:spAutoFit/>
+          </a:bodyPr>
+          <a:lstStyle/>
+          <a:p>
+            <a:pPr>
+              <a:spcAft>
+                <a:spcPts val="600"/>
+              </a:spcAft>
+            </a:pPr>
+            <a:r>
+              <a:rPr sz="1500">
+                <a:solidFill>
+                  <a:srgbClr val="22282E"/>
+                </a:solidFill>
+              </a:rPr>
+              <a:t>•  El objetivo desconfía de inmediato — Pretexto incoherente con el OSINT. Refuerza detalles y naturalidad.</a:t>
+            </a:r>
+          </a:p>
+          <a:p>
+            <a:pPr>
+              <a:spcAft>
+                <a:spcPts val="600"/>
+              </a:spcAft>
+            </a:pPr>
+            <a:r>
+              <a:rPr sz="1500">
+                <a:solidFill>
+                  <a:srgbClr val="22282E"/>
+                </a:solidFill>
+              </a:rPr>
+              <a:t>•  Presión excesiva sobre la persona — Cruzaste a la coacción. Usa empatía; el objetivo es probar controles, no doblegar personas.</a:t>
+            </a:r>
+          </a:p>
+          <a:p>
+            <a:pPr>
+              <a:spcAft>
+                <a:spcPts val="600"/>
+              </a:spcAft>
+            </a:pPr>
+            <a:r>
+              <a:rPr sz="1500">
+                <a:solidFill>
+                  <a:srgbClr val="22282E"/>
+                </a:solidFill>
+              </a:rPr>
+              <a:t>•  Problema legal por grabar — No hubo consentimiento/aviso. Verifica la ley antes de grabar.</a:t>
+            </a:r>
+          </a:p>
+          <a:p>
+            <a:pPr>
+              <a:spcAft>
+                <a:spcPts val="600"/>
+              </a:spcAft>
+            </a:pPr>
+            <a:r>
+              <a:rPr sz="1500">
+                <a:solidFill>
+                  <a:srgbClr val="22282E"/>
+                </a:solidFill>
+              </a:rPr>
+              <a:t>•  Sin datos útiles tras la llamada — Faltó objetivo claro. Define qué información/acción concreta buscas.</a:t>
+            </a:r>
+          </a:p>
+          <a:p>
+            <a:pPr>
+              <a:spcAft>
+                <a:spcPts val="600"/>
+              </a:spcAft>
+            </a:pPr>
+            <a:r>
+              <a:rPr sz="1500">
+                <a:solidFill>
+                  <a:srgbClr val="22282E"/>
+                </a:solidFill>
+              </a:rPr>
+              <a:t>•  Persona molesta tras el ejercicio — No hubo debrief. Explica siempre y cuida a las personas.</a:t>
+            </a:r>
+          </a:p>
+        </p:txBody>
+      </p:sp>
+    </p:spTree>
+  </p:cSld>
+  <p:clrMapOvr>
+    <a:masterClrMapping/>
+  </p:clrMapOvr>
+</p:sld>
+</file>
+
+<file path=ppt/slides/slide15.xml><?xml version="1.0" encoding="utf-8"?>
+<p:sld xmlns:a="http://schemas.openxmlformats.org/drawingml/2006/main" xmlns:p="http://schemas.openxmlformats.org/presentationml/2006/main" xmlns:r="http://schemas.openxmlformats.org/officeDocument/2006/relationships">
+  <p:cSld>
+    <p:spTree>
+      <p:nvGrpSpPr>
+        <p:cNvPr id="1" name=""/>
+        <p:cNvGrpSpPr/>
+        <p:nvPr/>
+      </p:nvGrpSpPr>
+      <p:grpSpPr/>
+      <p:sp>
+        <p:nvSpPr>
+          <p:cNvPr id="2" name="TextBox 1"/>
+          <p:cNvSpPr txBox="1"/>
+          <p:nvPr/>
+        </p:nvSpPr>
+        <p:spPr>
+          <a:xfrm>
+            <a:off x="457200" y="320040"/>
+            <a:ext cx="8229600" cy="822960"/>
+          </a:xfrm>
+          <a:prstGeom prst="rect">
+            <a:avLst/>
+          </a:prstGeom>
+          <a:noFill/>
+        </p:spPr>
+        <p:txBody>
+          <a:bodyPr wrap="square">
+            <a:spAutoFit/>
+          </a:bodyPr>
+          <a:lstStyle/>
+          <a:p>
+            <a:r>
+              <a:rPr sz="2600" b="1">
+                <a:solidFill>
+                  <a:srgbClr val="0B3D2E"/>
+                </a:solidFill>
+              </a:rPr>
+              <a:t>❓ Preguntas frecuentes</a:t>
+            </a:r>
+          </a:p>
+        </p:txBody>
+      </p:sp>
+      <p:sp>
+        <p:nvSpPr>
+          <p:cNvPr id="3" name="TextBox 2"/>
+          <p:cNvSpPr txBox="1"/>
+          <p:nvPr/>
+        </p:nvSpPr>
+        <p:spPr>
+          <a:xfrm>
+            <a:off x="457200" y="1280160"/>
+            <a:ext cx="8229600" cy="4937760"/>
+          </a:xfrm>
+          <a:prstGeom prst="rect">
+            <a:avLst/>
+          </a:prstGeom>
+          <a:noFill/>
+        </p:spPr>
+        <p:txBody>
+          <a:bodyPr wrap="square">
+            <a:spAutoFit/>
+          </a:bodyPr>
+          <a:lstStyle/>
+          <a:p>
+            <a:pPr>
+              <a:spcAft>
+                <a:spcPts val="600"/>
+              </a:spcAft>
+            </a:pPr>
+            <a:r>
+              <a:rPr sz="1500">
+                <a:solidFill>
+                  <a:srgbClr val="22282E"/>
+                </a:solidFill>
+              </a:rPr>
+              <a:t>•  ❓ ¿Puedo falsificar el número (spoofing)?</a:t>
+            </a:r>
+          </a:p>
+          <a:p>
+            <a:pPr>
+              <a:spcAft>
+                <a:spcPts val="600"/>
+              </a:spcAft>
+            </a:pPr>
+            <a:r>
+              <a:rPr sz="1500">
+                <a:solidFill>
+                  <a:srgbClr val="22282E"/>
+                </a:solidFill>
+              </a:rPr>
+              <a:t>•  Solo si el contrato lo autoriza y la ley de tu jurisdicción lo permite. En muchos lugares el spoofing</a:t>
+            </a:r>
+          </a:p>
+          <a:p>
+            <a:pPr>
+              <a:spcAft>
+                <a:spcPts val="600"/>
+              </a:spcAft>
+            </a:pPr>
+            <a:r>
+              <a:rPr sz="1500">
+                <a:solidFill>
+                  <a:srgbClr val="22282E"/>
+                </a:solidFill>
+              </a:rPr>
+              <a:t>•  fuera de pruebas autorizadas es delito.</a:t>
+            </a:r>
+          </a:p>
+          <a:p>
+            <a:pPr>
+              <a:spcAft>
+                <a:spcPts val="600"/>
+              </a:spcAft>
+            </a:pPr>
+            <a:r>
+              <a:rPr sz="1500">
+                <a:solidFill>
+                  <a:srgbClr val="22282E"/>
+                </a:solidFill>
+              </a:rPr>
+              <a:t>•  ❓ ¿Qué hago si logro comprometer algo real?</a:t>
+            </a:r>
+          </a:p>
+          <a:p>
+            <a:pPr>
+              <a:spcAft>
+                <a:spcPts val="600"/>
+              </a:spcAft>
+            </a:pPr>
+            <a:r>
+              <a:rPr sz="1500">
+                <a:solidFill>
+                  <a:srgbClr val="22282E"/>
+                </a:solidFill>
+              </a:rPr>
+              <a:t>•  Detente, documenta y escala según las Rules of Engagement. No profundices más allá del alcance.</a:t>
+            </a:r>
+          </a:p>
+          <a:p>
+            <a:pPr>
+              <a:spcAft>
+                <a:spcPts val="600"/>
+              </a:spcAft>
+            </a:pPr>
+            <a:r>
+              <a:rPr sz="1500">
+                <a:solidFill>
+                  <a:srgbClr val="22282E"/>
+                </a:solidFill>
+              </a:rPr>
+              <a:t>•  ❓ ¿El vishing sigue funcionando?</a:t>
+            </a:r>
+          </a:p>
+          <a:p>
+            <a:pPr>
+              <a:spcAft>
+                <a:spcPts val="600"/>
+              </a:spcAft>
+            </a:pPr>
+            <a:r>
+              <a:rPr sz="1500">
+                <a:solidFill>
+                  <a:srgbClr val="22282E"/>
+                </a:solidFill>
+              </a:rPr>
+              <a:t>•  Sí, es de los vectores más efectivos: la voz añade autoridad y urgencia que el correo no transmite.</a:t>
+            </a:r>
+          </a:p>
+        </p:txBody>
+      </p:sp>
+    </p:spTree>
+  </p:cSld>
+  <p:clrMapOvr>
+    <a:masterClrMapping/>
+  </p:clrMapOvr>
+</p:sld>
+</file>
+
+<file path=ppt/slides/slide16.xml><?xml version="1.0" encoding="utf-8"?>
+<p:sld xmlns:a="http://schemas.openxmlformats.org/drawingml/2006/main" xmlns:p="http://schemas.openxmlformats.org/presentationml/2006/main" xmlns:r="http://schemas.openxmlformats.org/officeDocument/2006/relationships">
+  <p:cSld>
+    <p:spTree>
+      <p:nvGrpSpPr>
+        <p:cNvPr id="1" name=""/>
+        <p:cNvGrpSpPr/>
+        <p:nvPr/>
+      </p:nvGrpSpPr>
+      <p:grpSpPr/>
+      <p:sp>
+        <p:nvSpPr>
+          <p:cNvPr id="2" name="TextBox 1"/>
+          <p:cNvSpPr txBox="1"/>
+          <p:nvPr/>
+        </p:nvSpPr>
+        <p:spPr>
+          <a:xfrm>
+            <a:off x="457200" y="320040"/>
+            <a:ext cx="8229600" cy="822960"/>
+          </a:xfrm>
+          <a:prstGeom prst="rect">
+            <a:avLst/>
+          </a:prstGeom>
+          <a:noFill/>
+        </p:spPr>
+        <p:txBody>
+          <a:bodyPr wrap="square">
+            <a:spAutoFit/>
+          </a:bodyPr>
+          <a:lstStyle/>
+          <a:p>
+            <a:r>
+              <a:rPr sz="2600" b="1">
+                <a:solidFill>
+                  <a:srgbClr val="0B3D2E"/>
+                </a:solidFill>
+              </a:rPr>
+              <a:t>🔗 Referencias</a:t>
+            </a:r>
+          </a:p>
+        </p:txBody>
+      </p:sp>
+      <p:sp>
+        <p:nvSpPr>
+          <p:cNvPr id="3" name="TextBox 2"/>
+          <p:cNvSpPr txBox="1"/>
+          <p:nvPr/>
+        </p:nvSpPr>
+        <p:spPr>
+          <a:xfrm>
+            <a:off x="457200" y="1280160"/>
+            <a:ext cx="8229600" cy="4937760"/>
+          </a:xfrm>
+          <a:prstGeom prst="rect">
+            <a:avLst/>
+          </a:prstGeom>
+          <a:noFill/>
+        </p:spPr>
+        <p:txBody>
+          <a:bodyPr wrap="square">
+            <a:spAutoFit/>
+          </a:bodyPr>
+          <a:lstStyle/>
+          <a:p>
+            <a:pPr>
+              <a:spcAft>
+                <a:spcPts val="600"/>
+              </a:spcAft>
+            </a:pPr>
+            <a:r>
+              <a:rPr sz="1500">
+                <a:solidFill>
+                  <a:srgbClr val="22282E"/>
+                </a:solidFill>
+              </a:rPr>
               <a:t>•  Hadnagy, C. Social Engineering: The Science of Human Hacking. Wiley.</a:t>
             </a:r>
           </a:p>
@@ -3749,6 +4245,81 @@
           </a:p>
         </p:txBody>
       </p:sp>
+    </p:spTree>
+  </p:cSld>
+  <p:clrMapOvr>
+    <a:masterClrMapping/>
+  </p:clrMapOvr>
+</p:sld>
+</file>
+
+<file path=ppt/slides/slide17.xml><?xml version="1.0" encoding="utf-8"?>
+<p:sld xmlns:a="http://schemas.openxmlformats.org/drawingml/2006/main" xmlns:p="http://schemas.openxmlformats.org/presentationml/2006/main" xmlns:r="http://schemas.openxmlformats.org/officeDocument/2006/relationships">
+  <p:cSld>
+    <p:spTree>
+      <p:nvGrpSpPr>
+        <p:cNvPr id="1" name=""/>
+        <p:cNvGrpSpPr/>
+        <p:nvPr/>
+      </p:nvGrpSpPr>
+      <p:grpSpPr/>
+      <p:sp>
+        <p:nvSpPr>
+          <p:cNvPr id="2" name="TextBox 1"/>
+          <p:cNvSpPr txBox="1"/>
+          <p:nvPr/>
+        </p:nvSpPr>
+        <p:spPr>
+          <a:xfrm>
+            <a:off x="457200" y="274320"/>
+            <a:ext cx="8229600" cy="640080"/>
+          </a:xfrm>
+          <a:prstGeom prst="rect">
+            <a:avLst/>
+          </a:prstGeom>
+          <a:noFill/>
+        </p:spPr>
+        <p:txBody>
+          <a:bodyPr wrap="square">
+            <a:spAutoFit/>
+          </a:bodyPr>
+          <a:lstStyle/>
+          <a:p>
+            <a:r>
+              <a:rPr sz="2200" b="1">
+                <a:solidFill>
+                  <a:srgbClr val="0B3D2E"/>
+                </a:solidFill>
+              </a:rPr>
+              <a:t>Diagrama de la clase</a:t>
+            </a:r>
+          </a:p>
+        </p:txBody>
+      </p:sp>
+      <p:pic>
+        <p:nvPicPr>
+          <p:cNvPr id="3" name="Picture 2" descr="a4fa64560a1ebed2.png"/>
+          <p:cNvPicPr>
+            <a:picLocks noChangeAspect="1"/>
+          </p:cNvPicPr>
+          <p:nvPr/>
+        </p:nvPicPr>
+        <p:blipFill>
+          <a:blip r:embed="rId2"/>
+          <a:stretch>
+            <a:fillRect/>
+          </a:stretch>
+        </p:blipFill>
+        <p:spPr>
+          <a:xfrm>
+            <a:off x="457200" y="2043684"/>
+            <a:ext cx="8229600" cy="3410712"/>
+          </a:xfrm>
+          <a:prstGeom prst="rect">
+            <a:avLst/>
+          </a:prstGeom>
+        </p:spPr>
+      </p:pic>
     </p:spTree>
   </p:cSld>
   <p:clrMapOvr>
@@ -4421,7 +4992,7 @@
                   <a:srgbClr val="0B3D2E"/>
                 </a:solidFill>
               </a:rPr>
-              <a:t>📖 Definiciones y características</a:t>
+              <a:t>🧠 Explicación en profundidad</a:t>
             </a:r>
           </a:p>
         </p:txBody>
@@ -4459,82 +5030,82 @@
                   <a:srgbClr val="22282E"/>
                 </a:solidFill>
               </a:rPr>
-              <a:t>•  Pretexting: crear un escenario/identidad falsa para justificar una petición. Característica: se sostiene en detalles obtenidos por OSINT.</a:t>
-            </a:r>
-          </a:p>
-          <a:p>
-            <a:pPr>
-              <a:spcAft>
-                <a:spcPts val="600"/>
-              </a:spcAft>
-            </a:pPr>
-            <a:r>
-              <a:rPr sz="1500">
-                <a:solidFill>
-                  <a:srgbClr val="22282E"/>
-                </a:solidFill>
-              </a:rPr>
-              <a:t>•  Vishing: phishing por voz/teléfono. Característica: la voz añade presión y autoridad en tiempo real.</a:t>
-            </a:r>
-          </a:p>
-          <a:p>
-            <a:pPr>
-              <a:spcAft>
-                <a:spcPts val="600"/>
-              </a:spcAft>
-            </a:pPr>
-            <a:r>
-              <a:rPr sz="1500">
-                <a:solidFill>
-                  <a:srgbClr val="22282E"/>
-                </a:solidFill>
-              </a:rPr>
-              <a:t>•  Elicitación: extraer información con conversación natural. Característica: la persona no percibe que está siendo interrogada.</a:t>
-            </a:r>
-          </a:p>
-          <a:p>
-            <a:pPr>
-              <a:spcAft>
-                <a:spcPts val="600"/>
-              </a:spcAft>
-            </a:pPr>
-            <a:r>
-              <a:rPr sz="1500">
-                <a:solidFill>
-                  <a:srgbClr val="22282E"/>
-                </a:solidFill>
-              </a:rPr>
-              <a:t>•  Caller ID spoofing: falsificar el número que aparece al receptor. Característica: legal solo en contextos autorizados y según jurisdicción.</a:t>
-            </a:r>
-          </a:p>
-          <a:p>
-            <a:pPr>
-              <a:spcAft>
-                <a:spcPts val="600"/>
-              </a:spcAft>
-            </a:pPr>
-            <a:r>
-              <a:rPr sz="1500">
-                <a:solidFill>
-                  <a:srgbClr val="22282E"/>
-                </a:solidFill>
-              </a:rPr>
-              <a:t>•  Objeción: resistencia del objetivo ("no puedo darte eso"). Característica: se maneja con empatía, no con presión abusiva.</a:t>
-            </a:r>
-          </a:p>
-          <a:p>
-            <a:pPr>
-              <a:spcAft>
-                <a:spcPts val="600"/>
-              </a:spcAft>
-            </a:pPr>
-            <a:r>
-              <a:rPr sz="1500">
-                <a:solidFill>
-                  <a:srgbClr val="22282E"/>
-                </a:solidFill>
-              </a:rPr>
-              <a:t>•  Debrief: reunión posterior para explicar el ejercicio. Característica: protege a las personas y consolida el aprendizaje.</a:t>
+              <a:t>•  En pretexting, la historia conecta identidad, contexto y solicitud: «soy soporte, hay una incidencia y necesito verificar tu código». En vishing, la voz añade sincronía, presión y dificultad para…</a:t>
+            </a:r>
+          </a:p>
+          <a:p>
+            <a:pPr>
+              <a:spcAft>
+                <a:spcPts val="600"/>
+              </a:spcAft>
+            </a:pPr>
+            <a:r>
+              <a:rPr sz="1500">
+                <a:solidFill>
+                  <a:srgbClr val="22282E"/>
+                </a:solidFill>
+              </a:rPr>
+              <a:t>•  El diagrama reemplaza la intuición por un procedimiento. La identificación de llamada, la voz y datos personales pueden falsificarse u obtenerse de fuentes abiertas. La devolución se hace a un…</a:t>
+            </a:r>
+          </a:p>
+          <a:p>
+            <a:pPr>
+              <a:spcAft>
+                <a:spcPts val="600"/>
+              </a:spcAft>
+            </a:pPr>
+            <a:r>
+              <a:rPr sz="1500">
+                <a:solidFill>
+                  <a:srgbClr val="22282E"/>
+                </a:solidFill>
+              </a:rPr>
+              <a:t>•  Los guiones defensivos deben ser breves: «No puedo validar esta solicitud en una llamada entrante; abriré un ticket y devolveré el contacto por el directorio oficial». También se requiere una ruta…</a:t>
+            </a:r>
+          </a:p>
+          <a:p>
+            <a:pPr>
+              <a:spcAft>
+                <a:spcPts val="600"/>
+              </a:spcAft>
+            </a:pPr>
+            <a:r>
+              <a:rPr sz="1500">
+                <a:solidFill>
+                  <a:srgbClr val="22282E"/>
+                </a:solidFill>
+              </a:rPr>
+              <a:t>•  Las señales de audio sintético o número alterado pueden ayudar, pero no constituyen una prueba confiable para el usuario. La defensa robusta autentica la transacción: número registrado, ticket…</a:t>
+            </a:r>
+          </a:p>
+          <a:p>
+            <a:pPr>
+              <a:spcAft>
+                <a:spcPts val="600"/>
+              </a:spcAft>
+            </a:pPr>
+            <a:r>
+              <a:rPr sz="1500">
+                <a:solidFill>
+                  <a:srgbClr val="22282E"/>
+                </a:solidFill>
+              </a:rPr>
+              <a:t>•  Una práctica de vishing usa actores informados, números controlados, guion aprobado y datos ficticios. No graba sin base legal, no busca secretos reales y detiene el ejercicio si surge una situación…</a:t>
+            </a:r>
+          </a:p>
+          <a:p>
+            <a:pPr>
+              <a:spcAft>
+                <a:spcPts val="600"/>
+              </a:spcAft>
+            </a:pPr>
+            <a:r>
+              <a:rPr sz="1500">
+                <a:solidFill>
+                  <a:srgbClr val="22282E"/>
+                </a:solidFill>
+              </a:rPr>
+              <a:t>•  Una llamada menciona el modelo exacto del portátil y un ticket real visto en una filtración de correo. El empleado no discute esos datos; abre el portal oficial, comprueba que el ticket no solicita…</a:t>
             </a:r>
           </a:p>
         </p:txBody>
@@ -4585,7 +5156,7 @@
                   <a:srgbClr val="0B3D2E"/>
                 </a:solidFill>
               </a:rPr>
-              <a:t>🧰 Herramientas y preparación</a:t>
+              <a:t>📔 Glosario operativo</a:t>
             </a:r>
           </a:p>
         </p:txBody>
@@ -4623,67 +5194,82 @@
                   <a:srgbClr val="22282E"/>
                 </a:solidFill>
               </a:rPr>
-              <a:t>•  Guion y árbol de decisión: documento con objetivo, apertura, ramas y salida.</a:t>
-            </a:r>
-          </a:p>
-          <a:p>
-            <a:pPr>
-              <a:spcAft>
-                <a:spcPts val="600"/>
-              </a:spcAft>
-            </a:pPr>
-            <a:r>
-              <a:rPr sz="1500">
-                <a:solidFill>
-                  <a:srgbClr val="22282E"/>
-                </a:solidFill>
-              </a:rPr>
-              <a:t>•  Telefonía de prueba: VoIP (p. ej. un softphone) con número dedicado del engagement; spoofing solo si el contrato y la ley lo permiten.</a:t>
-            </a:r>
-          </a:p>
-          <a:p>
-            <a:pPr>
-              <a:spcAft>
-                <a:spcPts val="600"/>
-              </a:spcAft>
-            </a:pPr>
-            <a:r>
-              <a:rPr sz="1500">
-                <a:solidFill>
-                  <a:srgbClr val="22282E"/>
-                </a:solidFill>
-              </a:rPr>
-              <a:t>•  Grabación: con consentimiento y cumplimiento legal; almacenamiento seguro de la evidencia.</a:t>
-            </a:r>
-          </a:p>
-          <a:p>
-            <a:pPr>
-              <a:spcAft>
-                <a:spcPts val="600"/>
-              </a:spcAft>
-            </a:pPr>
-            <a:r>
-              <a:rPr sz="1500">
-                <a:solidFill>
-                  <a:srgbClr val="22282E"/>
-                </a:solidFill>
-              </a:rPr>
-              <a:t>•  Entorno de ensayo: compañeros que consientan para practicar el guion sin objetivos reales.</a:t>
-            </a:r>
-          </a:p>
-          <a:p>
-            <a:pPr>
-              <a:spcAft>
-                <a:spcPts val="600"/>
-              </a:spcAft>
-            </a:pPr>
-            <a:r>
-              <a:rPr sz="1500">
-                <a:solidFill>
-                  <a:srgbClr val="22282E"/>
-                </a:solidFill>
-              </a:rPr>
-              <a:t>•  Recordatorio: sin autorización escrita de la organización objetivo, no hay llamada real.</a:t>
+              <a:t>•  Término — Definición útil</a:t>
+            </a:r>
+          </a:p>
+          <a:p>
+            <a:pPr>
+              <a:spcAft>
+                <a:spcPts val="600"/>
+              </a:spcAft>
+            </a:pPr>
+            <a:r>
+              <a:rPr sz="1500">
+                <a:solidFill>
+                  <a:srgbClr val="22282E"/>
+                </a:solidFill>
+              </a:rPr>
+              <a:t>•  Pretexting — Uso de una historia para legitimar identidad y solicitud.</a:t>
+            </a:r>
+          </a:p>
+          <a:p>
+            <a:pPr>
+              <a:spcAft>
+                <a:spcPts val="600"/>
+              </a:spcAft>
+            </a:pPr>
+            <a:r>
+              <a:rPr sz="1500">
+                <a:solidFill>
+                  <a:srgbClr val="22282E"/>
+                </a:solidFill>
+              </a:rPr>
+              <a:t>•  Vishing — Ingeniería social mediante voz o telefonía.</a:t>
+            </a:r>
+          </a:p>
+          <a:p>
+            <a:pPr>
+              <a:spcAft>
+                <a:spcPts val="600"/>
+              </a:spcAft>
+            </a:pPr>
+            <a:r>
+              <a:rPr sz="1500">
+                <a:solidFill>
+                  <a:srgbClr val="22282E"/>
+                </a:solidFill>
+              </a:rPr>
+              <a:t>•  Callback — Devolución por un número obtenido de una fuente confiable.</a:t>
+            </a:r>
+          </a:p>
+          <a:p>
+            <a:pPr>
+              <a:spcAft>
+                <a:spcPts val="600"/>
+              </a:spcAft>
+            </a:pPr>
+            <a:r>
+              <a:rPr sz="1500">
+                <a:solidFill>
+                  <a:srgbClr val="22282E"/>
+                </a:solidFill>
+              </a:rPr>
+              <a:t>•  MFA fatigue — Presión mediante solicitudes repetidas de aprobación.</a:t>
+            </a:r>
+          </a:p>
+          <a:p>
+            <a:pPr>
+              <a:spcAft>
+                <a:spcPts val="600"/>
+              </a:spcAft>
+            </a:pPr>
+            <a:r>
+              <a:rPr sz="1500">
+                <a:solidFill>
+                  <a:srgbClr val="22282E"/>
+                </a:solidFill>
+              </a:rPr>
+              <a:t>•  Autenticación de transacción — Verificación específica de la acción, no solo de la persona.</a:t>
             </a:r>
           </a:p>
         </p:txBody>
@@ -4734,7 +5320,7 @@
                   <a:srgbClr val="0B3D2E"/>
                 </a:solidFill>
               </a:rPr>
-              <a:t>🧪 Laboratorio guiado (autorizado / entre compañeros)</a:t>
+              <a:t>✅ Criterio de dominio</a:t>
             </a:r>
           </a:p>
         </p:txBody>
@@ -4772,97 +5358,7 @@
                   <a:srgbClr val="22282E"/>
                 </a:solidFill>
               </a:rPr>
-              <a:t>•  Toma el dossier OSINT de un objetivo de laboratorio (empresa ficticia) y extrae datos útiles.</a:t>
-            </a:r>
-          </a:p>
-          <a:p>
-            <a:pPr>
-              <a:spcAft>
-                <a:spcPts val="600"/>
-              </a:spcAft>
-            </a:pPr>
-            <a:r>
-              <a:rPr sz="1500">
-                <a:solidFill>
-                  <a:srgbClr val="22282E"/>
-                </a:solidFill>
-              </a:rPr>
-              <a:t>•  Define el objetivo de la llamada (ej.: verificar si el helpdesk resetea contraseñas sin validar identidad).</a:t>
-            </a:r>
-          </a:p>
-          <a:p>
-            <a:pPr>
-              <a:spcAft>
-                <a:spcPts val="600"/>
-              </a:spcAft>
-            </a:pPr>
-            <a:r>
-              <a:rPr sz="1500">
-                <a:solidFill>
-                  <a:srgbClr val="22282E"/>
-                </a:solidFill>
-              </a:rPr>
-              <a:t>•  Redacta el pretexto: identidad, motivo creíble, urgencia moderada, coherencia con el OSINT.</a:t>
-            </a:r>
-          </a:p>
-          <a:p>
-            <a:pPr>
-              <a:spcAft>
-                <a:spcPts val="600"/>
-              </a:spcAft>
-            </a:pPr>
-            <a:r>
-              <a:rPr sz="1500">
-                <a:solidFill>
-                  <a:srgbClr val="22282E"/>
-                </a:solidFill>
-              </a:rPr>
-              <a:t>•  Escribe el guion con apertura, 3 ramas de conversación y una salida limpia.</a:t>
-            </a:r>
-          </a:p>
-          <a:p>
-            <a:pPr>
-              <a:spcAft>
-                <a:spcPts val="600"/>
-              </a:spcAft>
-            </a:pPr>
-            <a:r>
-              <a:rPr sz="1500">
-                <a:solidFill>
-                  <a:srgbClr val="22282E"/>
-                </a:solidFill>
-              </a:rPr>
-              <a:t>•  Ensaya con un compañero que hace de "objetivo"; graba solo con su consentimiento.</a:t>
-            </a:r>
-          </a:p>
-          <a:p>
-            <a:pPr>
-              <a:spcAft>
-                <a:spcPts val="600"/>
-              </a:spcAft>
-            </a:pPr>
-            <a:r>
-              <a:rPr sz="1500">
-                <a:solidFill>
-                  <a:srgbClr val="22282E"/>
-                </a:solidFill>
-              </a:rPr>
-              <a:t>•  Practica la elicitación: obtén un dato objetivo sin preguntarlo de forma directa.</a:t>
-            </a:r>
-          </a:p>
-          <a:p>
-            <a:pPr>
-              <a:spcAft>
-                <a:spcPts val="600"/>
-              </a:spcAft>
-            </a:pPr>
-            <a:r>
-              <a:rPr sz="1500">
-                <a:solidFill>
-                  <a:srgbClr val="22282E"/>
-                </a:solidFill>
-              </a:rPr>
-              <a:t>•  Maneja una objeción ("no doy esa información") con empatía y sin coacción.</a:t>
+              <a:t>•  El alumno domina la clase cuando reconoce la acción sensible bajo un pretexto convincente, ejecuta verificación independiente, conserva datos útiles para respuesta y diseña un ejercicio seguro…</a:t>
             </a:r>
           </a:p>
         </p:txBody>
@@ -4913,7 +5409,7 @@
                   <a:srgbClr val="0B3D2E"/>
                 </a:solidFill>
               </a:rPr>
-              <a:t>✍️ Ejercicios</a:t>
+              <a:t>📖 Definiciones y características</a:t>
             </a:r>
           </a:p>
         </p:txBody>
@@ -4951,82 +5447,82 @@
                   <a:srgbClr val="22282E"/>
                 </a:solidFill>
               </a:rPr>
-              <a:t>•  Escribe dos pretextos para el mismo objetivo y compara su verosimilitud.</a:t>
-            </a:r>
-          </a:p>
-          <a:p>
-            <a:pPr>
-              <a:spcAft>
-                <a:spcPts val="600"/>
-              </a:spcAft>
-            </a:pPr>
-            <a:r>
-              <a:rPr sz="1500">
-                <a:solidFill>
-                  <a:srgbClr val="22282E"/>
-                </a:solidFill>
-              </a:rPr>
-              <a:t>•  Convierte 5 datos OSINT en frases que refuercen la credibilidad del guion.</a:t>
-            </a:r>
-          </a:p>
-          <a:p>
-            <a:pPr>
-              <a:spcAft>
-                <a:spcPts val="600"/>
-              </a:spcAft>
-            </a:pPr>
-            <a:r>
-              <a:rPr sz="1500">
-                <a:solidFill>
-                  <a:srgbClr val="22282E"/>
-                </a:solidFill>
-              </a:rPr>
-              <a:t>•  Redacta 3 técnicas de elicitación y ensáyalas con un compañero.</a:t>
-            </a:r>
-          </a:p>
-          <a:p>
-            <a:pPr>
-              <a:spcAft>
-                <a:spcPts val="600"/>
-              </a:spcAft>
-            </a:pPr>
-            <a:r>
-              <a:rPr sz="1500">
-                <a:solidFill>
-                  <a:srgbClr val="22282E"/>
-                </a:solidFill>
-              </a:rPr>
-              <a:t>•  Diseña respuestas éticas a 4 objeciones comunes.</a:t>
-            </a:r>
-          </a:p>
-          <a:p>
-            <a:pPr>
-              <a:spcAft>
-                <a:spcPts val="600"/>
-              </a:spcAft>
-            </a:pPr>
-            <a:r>
-              <a:rPr sz="1500">
-                <a:solidFill>
-                  <a:srgbClr val="22282E"/>
-                </a:solidFill>
-              </a:rPr>
-              <a:t>•  Investiga la legalidad de grabar llamadas y del spoofing en tu país.</a:t>
-            </a:r>
-          </a:p>
-          <a:p>
-            <a:pPr>
-              <a:spcAft>
-                <a:spcPts val="600"/>
-              </a:spcAft>
-            </a:pPr>
-            <a:r>
-              <a:rPr sz="1500">
-                <a:solidFill>
-                  <a:srgbClr val="22282E"/>
-                </a:solidFill>
-              </a:rPr>
-              <a:t>•  Propón un control de helpdesk que frustre tu propio pretexto.</a:t>
+              <a:t>•  Pretexting: crear un escenario/identidad falsa para justificar una petición. Característica: se sostiene en detalles obtenidos por OSINT.</a:t>
+            </a:r>
+          </a:p>
+          <a:p>
+            <a:pPr>
+              <a:spcAft>
+                <a:spcPts val="600"/>
+              </a:spcAft>
+            </a:pPr>
+            <a:r>
+              <a:rPr sz="1500">
+                <a:solidFill>
+                  <a:srgbClr val="22282E"/>
+                </a:solidFill>
+              </a:rPr>
+              <a:t>•  Vishing: phishing por voz/teléfono. Característica: la voz añade presión y autoridad en tiempo real.</a:t>
+            </a:r>
+          </a:p>
+          <a:p>
+            <a:pPr>
+              <a:spcAft>
+                <a:spcPts val="600"/>
+              </a:spcAft>
+            </a:pPr>
+            <a:r>
+              <a:rPr sz="1500">
+                <a:solidFill>
+                  <a:srgbClr val="22282E"/>
+                </a:solidFill>
+              </a:rPr>
+              <a:t>•  Elicitación: extraer información con conversación natural. Característica: la persona no percibe que está siendo interrogada.</a:t>
+            </a:r>
+          </a:p>
+          <a:p>
+            <a:pPr>
+              <a:spcAft>
+                <a:spcPts val="600"/>
+              </a:spcAft>
+            </a:pPr>
+            <a:r>
+              <a:rPr sz="1500">
+                <a:solidFill>
+                  <a:srgbClr val="22282E"/>
+                </a:solidFill>
+              </a:rPr>
+              <a:t>•  Caller ID spoofing: falsificar el número que aparece al receptor. Característica: legal solo en contextos autorizados y según jurisdicción.</a:t>
+            </a:r>
+          </a:p>
+          <a:p>
+            <a:pPr>
+              <a:spcAft>
+                <a:spcPts val="600"/>
+              </a:spcAft>
+            </a:pPr>
+            <a:r>
+              <a:rPr sz="1500">
+                <a:solidFill>
+                  <a:srgbClr val="22282E"/>
+                </a:solidFill>
+              </a:rPr>
+              <a:t>•  Objeción: resistencia del objetivo ("no puedo darte eso"). Característica: se maneja con empatía, no con presión abusiva.</a:t>
+            </a:r>
+          </a:p>
+          <a:p>
+            <a:pPr>
+              <a:spcAft>
+                <a:spcPts val="600"/>
+              </a:spcAft>
+            </a:pPr>
+            <a:r>
+              <a:rPr sz="1500">
+                <a:solidFill>
+                  <a:srgbClr val="22282E"/>
+                </a:solidFill>
+              </a:rPr>
+              <a:t>•  Debrief: reunión posterior para explicar el ejercicio. Característica: protege a las personas y consolida el aprendizaje.</a:t>
             </a:r>
           </a:p>
         </p:txBody>
